--- a/docs/investor-materials/v1.5/executive-ground-transport/CTDI-pitch-deck-executive-ground-transport.pptx
+++ b/docs/investor-materials/v1.5/executive-ground-transport/CTDI-pitch-deck-executive-ground-transport.pptx
@@ -3609,7 +3609,7 @@
               <a:defRPr sz="1800"/>
             </a:pPr>
             <a:r>
-              <a:t>Next step: live walkthrough of the production system and demo replay — info@csexecutiveservices.com</a:t>
+              <a:t>Next step: live walkthrough of the production system and demo replay — info@example.com</a:t>
             </a:r>
           </a:p>
         </p:txBody>
@@ -3688,7 +3688,7 @@
               <a:defRPr sz="1800"/>
             </a:pPr>
             <a:r>
-              <a:t>Built and operated by a chauffeur-operation principal — CS Executive Services, LLC, Arlington, VA</a:t>
+              <a:t>Built and operated by a chauffeur-operation principal — [operator LLC], LLC, Arlington, VA</a:t>
             </a:r>
           </a:p>
           <a:p>
